--- a/assets/pptx/catalog-265.pptx
+++ b/assets/pptx/catalog-265.pptx
@@ -3249,7 +3249,7 @@
                 <a:ea typeface="Ebrima"/>
                 <a:cs typeface="Ebrima"/>
               </a:rPr>
-              <a:t>ለጌታ አስፈልገዋለው (4x)</a:t>
+              <a:t>ለጌታ አስፈልገዋለው 4x</a:t>
             </a:r>
           </a:p>
           <a:p>
@@ -3267,7 +3267,7 @@
                 <a:ea typeface="Ebrima"/>
                 <a:cs typeface="Ebrima"/>
               </a:rPr>
-              <a:t>(ለአምላኬ) ለአምላኬ አስፈልገዋለው (4x)</a:t>
+              <a:t>ለአምላኬ ለአምላኬ አስፈልገዋለው 4x</a:t>
             </a:r>
           </a:p>
           <a:p>
@@ -3285,7 +3285,7 @@
                 <a:ea typeface="Ebrima"/>
                 <a:cs typeface="Ebrima"/>
               </a:rPr>
-              <a:t>(ለቤቱ) ለቤቱ አስፈልገዋለው (4x)</a:t>
+              <a:t>ለቤቱ ለቤቱ አስፈልገዋለው 4x</a:t>
             </a:r>
           </a:p>
           <a:p>
@@ -3303,7 +3303,7 @@
                 <a:ea typeface="Ebrima"/>
                 <a:cs typeface="Ebrima"/>
               </a:rPr>
-              <a:t>(ለስራው) ለስራው አስፈልገዋለው (4x)</a:t>
+              <a:t>ለስራው ለስራው አስፈልገዋለው 4x</a:t>
             </a:r>
           </a:p>
         </p:txBody>
@@ -3370,7 +3370,7 @@
                 <a:ea typeface="Ebrima"/>
                 <a:cs typeface="Ebrima"/>
               </a:rPr>
-              <a:t>ለጌታ አስፈልገዋለው (4x)</a:t>
+              <a:t>ለጌታ አስፈልገዋለው 4x</a:t>
             </a:r>
           </a:p>
           <a:p>
@@ -3388,7 +3388,7 @@
                 <a:ea typeface="Ebrima"/>
                 <a:cs typeface="Ebrima"/>
               </a:rPr>
-              <a:t>ለአምላኬ አስፈልገዋለው (4x)</a:t>
+              <a:t>ለአምላኬ አስፈልገዋለው 4x</a:t>
             </a:r>
           </a:p>
           <a:p>
@@ -3406,7 +3406,7 @@
                 <a:ea typeface="Ebrima"/>
                 <a:cs typeface="Ebrima"/>
               </a:rPr>
-              <a:t>ለቤቱ አስፈልገዋለው (4x)</a:t>
+              <a:t>ለቤቱ አስፈልገዋለው 4x</a:t>
             </a:r>
           </a:p>
           <a:p>
@@ -3424,7 +3424,7 @@
                 <a:ea typeface="Ebrima"/>
                 <a:cs typeface="Ebrima"/>
               </a:rPr>
-              <a:t>ለስራው አስፈልገዋለው (4x)</a:t>
+              <a:t>ለስራው አስፈልገዋለው 4x</a:t>
             </a:r>
           </a:p>
         </p:txBody>
@@ -3563,7 +3563,7 @@
                 <a:ea typeface="Ebrima"/>
                 <a:cs typeface="Ebrima"/>
               </a:rPr>
-              <a:t>ያለ እኔ (3x) አይሄድም</a:t>
+              <a:t>ያለ እኔ 3x አይሄድም</a:t>
             </a:r>
           </a:p>
         </p:txBody>
@@ -3630,7 +3630,7 @@
                 <a:ea typeface="Ebrima"/>
                 <a:cs typeface="Ebrima"/>
               </a:rPr>
-              <a:t>ለጌታ አስፈልገዋለው (4x)</a:t>
+              <a:t>ለጌታ አስፈልገዋለው 4x</a:t>
             </a:r>
           </a:p>
           <a:p>
@@ -3648,7 +3648,7 @@
                 <a:ea typeface="Ebrima"/>
                 <a:cs typeface="Ebrima"/>
               </a:rPr>
-              <a:t>ለአምላኬ አስፈልገዋለው (4x)</a:t>
+              <a:t>ለአምላኬ አስፈልገዋለው 4x</a:t>
             </a:r>
           </a:p>
           <a:p>
@@ -3666,7 +3666,7 @@
                 <a:ea typeface="Ebrima"/>
                 <a:cs typeface="Ebrima"/>
               </a:rPr>
-              <a:t>ለቤቱ አስፈልገዋለው (4x)</a:t>
+              <a:t>ለቤቱ አስፈልገዋለው 4x</a:t>
             </a:r>
           </a:p>
           <a:p>
@@ -3684,7 +3684,7 @@
                 <a:ea typeface="Ebrima"/>
                 <a:cs typeface="Ebrima"/>
               </a:rPr>
-              <a:t>ለስራው አስፈልገዋለው (4x)</a:t>
+              <a:t>ለስራው አስፈልገዋለው 4x</a:t>
             </a:r>
           </a:p>
         </p:txBody>
@@ -3823,7 +3823,7 @@
                 <a:ea typeface="Ebrima"/>
                 <a:cs typeface="Ebrima"/>
               </a:rPr>
-              <a:t>ላዬ ላይ ስላለ . (1) . እንድረግጠው</a:t>
+              <a:t>ላዬ ላይ ስላለ . 1 . እንድረግጠው</a:t>
             </a:r>
           </a:p>
           <a:p>
@@ -3841,7 +3841,7 @@
                 <a:ea typeface="Ebrima"/>
                 <a:cs typeface="Ebrima"/>
               </a:rPr>
-              <a:t>የእርሱ እግር ሲረግጠው (3x)</a:t>
+              <a:t>የእርሱ እግር ሲረግጠው 3x</a:t>
             </a:r>
           </a:p>
           <a:p>
@@ -3926,7 +3926,7 @@
                 <a:ea typeface="Ebrima"/>
                 <a:cs typeface="Ebrima"/>
               </a:rPr>
-              <a:t>ለጌታ አስፈልገዋለው (4x)</a:t>
+              <a:t>ለጌታ አስፈልገዋለው 4x</a:t>
             </a:r>
           </a:p>
           <a:p>
@@ -3944,7 +3944,7 @@
                 <a:ea typeface="Ebrima"/>
                 <a:cs typeface="Ebrima"/>
               </a:rPr>
-              <a:t>ለአምላኬ አስፈልገዋለው (4x)</a:t>
+              <a:t>ለአምላኬ አስፈልገዋለው 4x</a:t>
             </a:r>
           </a:p>
           <a:p>
@@ -3962,7 +3962,7 @@
                 <a:ea typeface="Ebrima"/>
                 <a:cs typeface="Ebrima"/>
               </a:rPr>
-              <a:t>ለቤቱ አስፈልገዋለው (4x)</a:t>
+              <a:t>ለቤቱ አስፈልገዋለው 4x</a:t>
             </a:r>
           </a:p>
           <a:p>
@@ -3980,7 +3980,7 @@
                 <a:ea typeface="Ebrima"/>
                 <a:cs typeface="Ebrima"/>
               </a:rPr>
-              <a:t>ለስራው አስፈልገዋለው (4x)</a:t>
+              <a:t>ለስራው አስፈልገዋለው 4x</a:t>
             </a:r>
           </a:p>
         </p:txBody>
@@ -4155,7 +4155,7 @@
                 <a:ea typeface="Ebrima"/>
                 <a:cs typeface="Ebrima"/>
               </a:rPr>
-              <a:t>አስፈልገዋለሁ አዎ አስፈልገዋለሁ አሜን (4x)</a:t>
+              <a:t>አስፈልገዋለሁ አዎ አስፈልገዋለሁ አሜን 4x</a:t>
             </a:r>
           </a:p>
         </p:txBody>
@@ -4240,7 +4240,7 @@
                 <a:ea typeface="Ebrima"/>
                 <a:cs typeface="Ebrima"/>
               </a:rPr>
-              <a:t>ይሄዳል ጌታዏ (ተቀምጦ በላዬ)</a:t>
+              <a:t>ይሄዳል ጌታዏ ተቀምጦ በላዬ</a:t>
             </a:r>
           </a:p>
           <a:p>
@@ -4258,7 +4258,7 @@
                 <a:ea typeface="Ebrima"/>
                 <a:cs typeface="Ebrima"/>
               </a:rPr>
-              <a:t>ይሰራል ጌታዏ (ተቀምጦ በላዬ)</a:t>
+              <a:t>ይሰራል ጌታዏ ተቀምጦ በላዬ</a:t>
             </a:r>
           </a:p>
           <a:p>
@@ -4276,7 +4276,7 @@
                 <a:ea typeface="Ebrima"/>
                 <a:cs typeface="Ebrima"/>
               </a:rPr>
-              <a:t>ይፈታል ጌታዏ (ተቀምጦ በላዬ)</a:t>
+              <a:t>ይፈታል ጌታዏ ተቀምጦ በላዬ</a:t>
             </a:r>
           </a:p>
           <a:p>
@@ -4294,7 +4294,7 @@
                 <a:ea typeface="Ebrima"/>
                 <a:cs typeface="Ebrima"/>
               </a:rPr>
-              <a:t>ይሰብካል ጌታዏ (ተቀምጦ በላዬ)</a:t>
+              <a:t>ይሰብካል ጌታዏ ተቀምጦ በላዬ</a:t>
             </a:r>
           </a:p>
           <a:p>
@@ -4312,7 +4312,7 @@
                 <a:ea typeface="Ebrima"/>
                 <a:cs typeface="Ebrima"/>
               </a:rPr>
-              <a:t>ይዘምራል ጌታዏ (ተቀምጦ በላዬ)</a:t>
+              <a:t>ይዘምራል ጌታዏ ተቀምጦ በላዬ</a:t>
             </a:r>
           </a:p>
           <a:p>
@@ -4330,7 +4330,7 @@
                 <a:ea typeface="Ebrima"/>
                 <a:cs typeface="Ebrima"/>
               </a:rPr>
-              <a:t>ይመራል ጌታዏ (ተቀምጦ በላዬ)</a:t>
+              <a:t>ይመራል ጌታዏ ተቀምጦ በላዬ</a:t>
             </a:r>
           </a:p>
           <a:p>
@@ -4348,7 +4348,7 @@
                 <a:ea typeface="Ebrima"/>
                 <a:cs typeface="Ebrima"/>
               </a:rPr>
-              <a:t>ያጽናናል ጌታዏ (ተቀምጦ በላዬ)</a:t>
+              <a:t>ያጽናናል ጌታዏ ተቀምጦ በላዬ</a:t>
             </a:r>
           </a:p>
           <a:p>
@@ -4366,7 +4366,7 @@
                 <a:ea typeface="Ebrima"/>
                 <a:cs typeface="Ebrima"/>
               </a:rPr>
-              <a:t>ይፈውሳል ጌታዏ (ተቀምጦ በላዬ)</a:t>
+              <a:t>ይፈውሳል ጌታዏ ተቀምጦ በላዬ</a:t>
             </a:r>
           </a:p>
           <a:p>
@@ -4384,7 +4384,7 @@
                 <a:ea typeface="Ebrima"/>
                 <a:cs typeface="Ebrima"/>
               </a:rPr>
-              <a:t>ያድናል ጌታዏ (ተቀምጦ በላዬ)</a:t>
+              <a:t>ያድናል ጌታዏ ተቀምጦ በላዬ</a:t>
             </a:r>
           </a:p>
           <a:p>
@@ -4402,7 +4402,7 @@
                 <a:ea typeface="Ebrima"/>
                 <a:cs typeface="Ebrima"/>
               </a:rPr>
-              <a:t>ይታያል ጌታዏ (ተቀምጦ በላዬ)</a:t>
+              <a:t>ይታያል ጌታዏ ተቀምጦ በላዬ</a:t>
             </a:r>
           </a:p>
           <a:p>
@@ -4420,7 +4420,7 @@
                 <a:ea typeface="Ebrima"/>
                 <a:cs typeface="Ebrima"/>
               </a:rPr>
-              <a:t>በላዬ በላዬ ተቀምጦ በላዬ (2x)</a:t>
+              <a:t>በላዬ በላዬ ተቀምጦ በላዬ 2x</a:t>
             </a:r>
           </a:p>
         </p:txBody>
@@ -4523,7 +4523,7 @@
                 <a:ea typeface="Ebrima"/>
                 <a:cs typeface="Ebrima"/>
               </a:rPr>
-              <a:t>ከፍ ከፍ ከፍ ከፍ ብሎ (3x)</a:t>
+              <a:t>ከፍ ከፍ ከፍ ከፍ ብሎ 3x</a:t>
             </a:r>
           </a:p>
           <a:p>
@@ -4559,7 +4559,7 @@
                 <a:ea typeface="Ebrima"/>
                 <a:cs typeface="Ebrima"/>
               </a:rPr>
-              <a:t>አዎ በልጦ በልጦ (3x)</a:t>
+              <a:t>አዎ በልጦ በልጦ 3x</a:t>
             </a:r>
           </a:p>
         </p:txBody>
